--- a/generated_cvs/6a75918d8dcfd53b573b8eef.pptx
+++ b/generated_cvs/6a75918d8dcfd53b573b8eef.pptx
@@ -10451,7 +10451,7 @@
         <p:fade/>
       </p:transition>
     </mc:Choice>
-    <mc:Fallback xmlns="" xmlns:mv="urn:schemas-microsoft-com:mac:vml" xmlns:c="http://schemas.openxmlformats.org/drawingml/2006/chart" xmlns:dgm="http://schemas.openxmlformats.org/drawingml/2006/diagram" xmlns:o="urn:schemas-microsoft-com:office:office" xmlns:v="urn:schemas-microsoft-com:vml" xmlns:pvml="urn:schemas-microsoft-com:office:powerpoint" xmlns:com="http://schemas.openxmlformats.org/drawingml/2006/compatibility" xmlns:p15="http://schemas.microsoft.com/office/powerpoint/2012/main" xmlns:ahyp="http://schemas.microsoft.com/office/drawing/2018/hyperlinkcolor">
+    <mc:Fallback xmlns:ahyp="http://schemas.microsoft.com/office/drawing/2018/hyperlinkcolor" xmlns:p15="http://schemas.microsoft.com/office/powerpoint/2012/main" xmlns:com="http://schemas.openxmlformats.org/drawingml/2006/compatibility" xmlns:pvml="urn:schemas-microsoft-com:office:powerpoint" xmlns:v="urn:schemas-microsoft-com:vml" xmlns:o="urn:schemas-microsoft-com:office:office" xmlns:dgm="http://schemas.openxmlformats.org/drawingml/2006/diagram" xmlns:c="http://schemas.openxmlformats.org/drawingml/2006/chart" xmlns:mv="urn:schemas-microsoft-com:mac:vml" xmlns="">
       <p:transition spd="med">
         <p:fade/>
       </p:transition>
@@ -16883,7 +16883,7 @@
                   <a:schemeClr val="dk1"/>
                 </a:solidFill>
               </a:rPr>
-              <a:t/>
+              <a:t>Regional Manager</a:t>
             </a:r>
             <a:endParaRPr sz="900" b="1" dirty="0">
               <a:solidFill>
@@ -17008,7 +17008,7 @@
             </a:pPr>
             <a:r>
               <a:rPr sz="800"/>
-              <a:t>Network (Cisco)  •  Vulnerability scan  •  SIEM  •  Linux  •  Web testing  •  CVSS scoring  •  Business Continuity Planning  •  IEC 27005 EBIOS  •  COBIT  •  Configuration audits  •  ISMS  •  ITIL  •  ISO 27005  •  Squid  •  PCI/DSS  •  ISO 27001  •  Application testing  •  Hardening  •  ISO 22301  •  Platform Securing  •  Infrastructure Security  •  Antivirus  •  OWASP  •  Risk Management  •  Kerberos  •  Ntop  •  IAM (RSA)  •  CIS Benchmarks  •  Red Hat  •  Penetration Testing  •  Active Directory  •  ISO 27002  •  Nagios  •  OpenLDAP  •  Crisis Management  •  Firewall  •  Solaris  •  BCP/DRP  •  Samba  •  Network testing  •  BIA  •  Audit</a:t>
+              <a:t>Network (Cisco)  •  Vulnerability scan  •  SIEM  •  Linux  •  Web testing  •  CVSS scoring  •  Business Continuity Planning  •  IEC 27005 EBIOS  •  COBIT  •  Configuration audits  •  ISMS  •  ITIL  •  ISO 27005  •  Squid  •  PCI/DSS  •  ISO 27001  •  Application testing  •  Hardening  •  ISO 22301  •  Platform Securing  •  Infrastructure Security  •  Antivirus  •  OWASP  •  Risk Management  •  Kerberos  •  Ntop  •  IAM (RSA)  •  CIS Benchmarks  •  Red Hat  •  Penetration Testing</a:t>
             </a:r>
           </a:p>
         </p:txBody>
@@ -17044,21 +17044,7 @@
           </a:bodyPr>
           <a:lstStyle/>
           <a:p>
-            <a:r>
-              <a:rPr b="1" sz="800"/>
-              <a:t>Quanthouse</a:t>
-            </a:r>
             <a:endParaRPr lang="fr-FR" sz="825" b="1" dirty="0"/>
-          </a:p>
-          <a:p>
-            <a:pPr marL="128588" indent="-128588">
-              <a:buFont typeface="Arial"/>
-              <a:buChar char="•"/>
-            </a:pPr>
-            <a:r>
-              <a:rPr sz="800"/>
-              <a:t>Gray-box audit of a trading platform</a:t>
-            </a:r>
           </a:p>
         </p:txBody>
       </p:sp>
@@ -17304,193 +17290,9 @@
             <a:pPr marL="63499" algn="just" defTabSz="914378">
               <a:buSzPts val="600"/>
             </a:pPr>
-            <a:r>
-              <a:rPr b="1" sz="800"/>
-              <a:t>ANSI (National Cybersecurity Agency)</a:t>
-            </a:r>
-          </a:p>
-          <a:p>
-            <a:pPr marL="128588" indent="-128588">
-              <a:buFont typeface="Arial"/>
-              <a:buChar char="•"/>
-            </a:pPr>
-            <a:r>
-              <a:rPr sz="800"/>
-              <a:t>Implementation of security solutions based on open-source products</a:t>
-            </a:r>
-          </a:p>
-          <a:p>
-            <a:pPr marL="128588" indent="-128588">
-              <a:buFont typeface="Arial"/>
-              <a:buChar char="•"/>
-            </a:pPr>
-            <a:r>
-              <a:rPr sz="800"/>
-              <a:t>Implementation of a security monitoring system for TunCERT based on open-source tools</a:t>
-            </a:r>
-          </a:p>
-          <a:p>
-            <a:pPr marL="128588" indent="-128588">
-              <a:buFont typeface="Arial"/>
-              <a:buChar char="•"/>
-            </a:pPr>
-            <a:r>
-              <a:rPr sz="800"/>
-              <a:t>Drafting of monitoring procedures on behalf of ANSI</a:t>
-            </a:r>
-          </a:p>
-          <a:p>
-            <a:pPr marL="128588" indent="-128588">
-              <a:buFont typeface="Arial"/>
-              <a:buChar char="•"/>
-            </a:pPr>
-            <a:r>
-              <a:rPr sz="800"/>
-              <a:t>Participated in the implementation of several network architectures for public agencies based on open-source solutions (OpenLDAP, Nagios, Ntop, Squid, etc.)</a:t>
-            </a:r>
-          </a:p>
-          <a:p>
-            <a:pPr marL="128588" indent="-128588">
-              <a:buFont typeface="Arial"/>
-              <a:buChar char="•"/>
-            </a:pPr>
-            <a:r>
-              <a:rPr sz="800"/>
-              <a:t>Conducted penetration testing on several environments of high national criticality</a:t>
-            </a:r>
           </a:p>
         </p:txBody>
       </p:sp>
-      <p:pic>
-        <p:nvPicPr>
-          <p:cNvPr id="9" name="Picture 8" descr="BNP Paribas APM | Secure Bank Transfers via BNP Paribas (Poland) | Nuvei">
-            <a:extLst>
-              <a:ext uri="{FF2B5EF4-FFF2-40B4-BE49-F238E27FC236}">
-                <a16:creationId xmlns:a16="http://schemas.microsoft.com/office/drawing/2014/main" id="{31D844EB-1213-51E4-168A-C35FE5FAC789}"/>
-              </a:ext>
-            </a:extLst>
-          </p:cNvPr>
-          <p:cNvPicPr>
-            <a:picLocks noChangeAspect="1"/>
-          </p:cNvPicPr>
-          <p:nvPr/>
-        </p:nvPicPr>
-        <p:blipFill>
-          <a:blip r:embed="rId4"/>
-          <a:srcRect l="8215" t="18070" r="9473" b="17869"/>
-          <a:stretch>
-            <a:fillRect/>
-          </a:stretch>
-        </p:blipFill>
-        <p:spPr>
-          <a:xfrm>
-            <a:off x="5397451" y="1131194"/>
-            <a:ext cx="956167" cy="464925"/>
-          </a:xfrm>
-          <a:prstGeom prst="rect">
-            <a:avLst/>
-          </a:prstGeom>
-        </p:spPr>
-      </p:pic>
-      <p:pic>
-        <p:nvPicPr>
-          <p:cNvPr id="11" name="Google Shape;899;p91">
-            <a:extLst>
-              <a:ext uri="{FF2B5EF4-FFF2-40B4-BE49-F238E27FC236}">
-                <a16:creationId xmlns:a16="http://schemas.microsoft.com/office/drawing/2014/main" id="{5C09DBA2-1B50-1880-19A2-A132262DC376}"/>
-              </a:ext>
-            </a:extLst>
-          </p:cNvPr>
-          <p:cNvPicPr preferRelativeResize="0"/>
-          <p:nvPr/>
-        </p:nvPicPr>
-        <p:blipFill rotWithShape="1">
-          <a:blip r:embed="rId5" cstate="screen">
-            <a:alphaModFix/>
-            <a:extLst>
-              <a:ext uri="{28A0092B-C50C-407E-A947-70E740481C1C}">
-                <a14:useLocalDpi xmlns:a14="http://schemas.microsoft.com/office/drawing/2010/main"/>
-              </a:ext>
-            </a:extLst>
-          </a:blip>
-          <a:srcRect/>
-          <a:stretch/>
-        </p:blipFill>
-        <p:spPr>
-          <a:xfrm>
-            <a:off x="3982618" y="1249398"/>
-            <a:ext cx="1098496" cy="247462"/>
-          </a:xfrm>
-          <a:prstGeom prst="rect">
-            <a:avLst/>
-          </a:prstGeom>
-          <a:noFill/>
-          <a:ln>
-            <a:noFill/>
-          </a:ln>
-        </p:spPr>
-      </p:pic>
-      <p:pic>
-        <p:nvPicPr>
-          <p:cNvPr id="13" name="Picture 12" descr="BMCI Groupe BNP Paribas">
-            <a:extLst>
-              <a:ext uri="{FF2B5EF4-FFF2-40B4-BE49-F238E27FC236}">
-                <a16:creationId xmlns:a16="http://schemas.microsoft.com/office/drawing/2014/main" id="{3AC2A943-C18C-CDED-2A1D-86F5378644D2}"/>
-              </a:ext>
-            </a:extLst>
-          </p:cNvPr>
-          <p:cNvPicPr>
-            <a:picLocks noChangeAspect="1"/>
-          </p:cNvPicPr>
-          <p:nvPr/>
-        </p:nvPicPr>
-        <p:blipFill>
-          <a:blip r:embed="rId6"/>
-          <a:srcRect t="24731" b="19549"/>
-          <a:stretch>
-            <a:fillRect/>
-          </a:stretch>
-        </p:blipFill>
-        <p:spPr>
-          <a:xfrm>
-            <a:off x="6523865" y="1065467"/>
-            <a:ext cx="1108647" cy="617743"/>
-          </a:xfrm>
-          <a:prstGeom prst="rect">
-            <a:avLst/>
-          </a:prstGeom>
-        </p:spPr>
-      </p:pic>
-      <p:pic>
-        <p:nvPicPr>
-          <p:cNvPr id="15" name="Picture 14" descr="UBCI | Nous connaitre">
-            <a:extLst>
-              <a:ext uri="{FF2B5EF4-FFF2-40B4-BE49-F238E27FC236}">
-                <a16:creationId xmlns:a16="http://schemas.microsoft.com/office/drawing/2014/main" id="{BE5555BB-11F5-F0E8-34B2-7C2C920BB064}"/>
-              </a:ext>
-            </a:extLst>
-          </p:cNvPr>
-          <p:cNvPicPr>
-            <a:picLocks noChangeAspect="1"/>
-          </p:cNvPicPr>
-          <p:nvPr/>
-        </p:nvPicPr>
-        <p:blipFill>
-          <a:blip r:embed="rId7"/>
-          <a:stretch>
-            <a:fillRect/>
-          </a:stretch>
-        </p:blipFill>
-        <p:spPr>
-          <a:xfrm>
-            <a:off x="7900400" y="1249398"/>
-            <a:ext cx="929493" cy="279603"/>
-          </a:xfrm>
-          <a:prstGeom prst="rect">
-            <a:avLst/>
-          </a:prstGeom>
-        </p:spPr>
-      </p:pic>
     </p:spTree>
     <p:extLst>
       <p:ext uri="{BB962C8B-B14F-4D97-AF65-F5344CB8AC3E}">
@@ -17558,20 +17360,6 @@
             <a:pPr marL="63499" algn="just" defTabSz="914378">
               <a:buSzPts val="600"/>
             </a:pPr>
-            <a:r>
-              <a:rPr b="1" sz="800"/>
-              <a:t>Bouyer le Roux</a:t>
-            </a:r>
-          </a:p>
-          <a:p>
-            <a:pPr marL="128588" indent="-128588">
-              <a:buFont typeface="Arial"/>
-              <a:buChar char="•"/>
-            </a:pPr>
-            <a:r>
-              <a:rPr sz="800"/>
-              <a:t>Penetration testing</a:t>
-            </a:r>
           </a:p>
         </p:txBody>
       </p:sp>
@@ -18251,7 +18039,7 @@
                   <a:schemeClr val="dk1"/>
                 </a:solidFill>
               </a:rPr>
-              <a:t/>
+              <a:t>Regional Manager</a:t>
             </a:r>
             <a:endParaRPr lang="en-GB" sz="900" b="1" dirty="0">
               <a:solidFill>
@@ -18261,136 +18049,6 @@
           </a:p>
         </p:txBody>
       </p:sp>
-      <p:pic>
-        <p:nvPicPr>
-          <p:cNvPr id="18" name="Picture 17" descr="BNP Paribas APM | Secure Bank Transfers via BNP Paribas (Poland) | Nuvei">
-            <a:extLst>
-              <a:ext uri="{FF2B5EF4-FFF2-40B4-BE49-F238E27FC236}">
-                <a16:creationId xmlns:a16="http://schemas.microsoft.com/office/drawing/2014/main" id="{CA14C6B4-5380-4FE3-15CA-75490A2776B2}"/>
-              </a:ext>
-            </a:extLst>
-          </p:cNvPr>
-          <p:cNvPicPr>
-            <a:picLocks noChangeAspect="1"/>
-          </p:cNvPicPr>
-          <p:nvPr/>
-        </p:nvPicPr>
-        <p:blipFill>
-          <a:blip r:embed="rId3"/>
-          <a:srcRect l="8215" t="18070" r="9473" b="17869"/>
-          <a:stretch>
-            <a:fillRect/>
-          </a:stretch>
-        </p:blipFill>
-        <p:spPr>
-          <a:xfrm>
-            <a:off x="5397451" y="1131194"/>
-            <a:ext cx="956167" cy="464925"/>
-          </a:xfrm>
-          <a:prstGeom prst="rect">
-            <a:avLst/>
-          </a:prstGeom>
-        </p:spPr>
-      </p:pic>
-      <p:pic>
-        <p:nvPicPr>
-          <p:cNvPr id="20" name="Google Shape;899;p91">
-            <a:extLst>
-              <a:ext uri="{FF2B5EF4-FFF2-40B4-BE49-F238E27FC236}">
-                <a16:creationId xmlns:a16="http://schemas.microsoft.com/office/drawing/2014/main" id="{60E9E407-A7A1-FAEC-0D77-C01E7089B582}"/>
-              </a:ext>
-            </a:extLst>
-          </p:cNvPr>
-          <p:cNvPicPr preferRelativeResize="0"/>
-          <p:nvPr/>
-        </p:nvPicPr>
-        <p:blipFill rotWithShape="1">
-          <a:blip r:embed="rId4" cstate="screen">
-            <a:alphaModFix/>
-            <a:extLst>
-              <a:ext uri="{28A0092B-C50C-407E-A947-70E740481C1C}">
-                <a14:useLocalDpi xmlns:a14="http://schemas.microsoft.com/office/drawing/2010/main"/>
-              </a:ext>
-            </a:extLst>
-          </a:blip>
-          <a:srcRect/>
-          <a:stretch/>
-        </p:blipFill>
-        <p:spPr>
-          <a:xfrm>
-            <a:off x="3982618" y="1249398"/>
-            <a:ext cx="1098496" cy="247462"/>
-          </a:xfrm>
-          <a:prstGeom prst="rect">
-            <a:avLst/>
-          </a:prstGeom>
-          <a:noFill/>
-          <a:ln>
-            <a:noFill/>
-          </a:ln>
-        </p:spPr>
-      </p:pic>
-      <p:pic>
-        <p:nvPicPr>
-          <p:cNvPr id="22" name="Picture 21" descr="BMCI Groupe BNP Paribas">
-            <a:extLst>
-              <a:ext uri="{FF2B5EF4-FFF2-40B4-BE49-F238E27FC236}">
-                <a16:creationId xmlns:a16="http://schemas.microsoft.com/office/drawing/2014/main" id="{758FFA84-6019-AA42-10EB-BEA554BEF4C2}"/>
-              </a:ext>
-            </a:extLst>
-          </p:cNvPr>
-          <p:cNvPicPr>
-            <a:picLocks noChangeAspect="1"/>
-          </p:cNvPicPr>
-          <p:nvPr/>
-        </p:nvPicPr>
-        <p:blipFill>
-          <a:blip r:embed="rId5"/>
-          <a:srcRect t="24731" b="19549"/>
-          <a:stretch>
-            <a:fillRect/>
-          </a:stretch>
-        </p:blipFill>
-        <p:spPr>
-          <a:xfrm>
-            <a:off x="6523865" y="1065467"/>
-            <a:ext cx="1108647" cy="617743"/>
-          </a:xfrm>
-          <a:prstGeom prst="rect">
-            <a:avLst/>
-          </a:prstGeom>
-        </p:spPr>
-      </p:pic>
-      <p:pic>
-        <p:nvPicPr>
-          <p:cNvPr id="24" name="Picture 23" descr="UBCI | Nous connaitre">
-            <a:extLst>
-              <a:ext uri="{FF2B5EF4-FFF2-40B4-BE49-F238E27FC236}">
-                <a16:creationId xmlns:a16="http://schemas.microsoft.com/office/drawing/2014/main" id="{E720C7A7-E968-70D6-0015-59606F9F017E}"/>
-              </a:ext>
-            </a:extLst>
-          </p:cNvPr>
-          <p:cNvPicPr>
-            <a:picLocks noChangeAspect="1"/>
-          </p:cNvPicPr>
-          <p:nvPr/>
-        </p:nvPicPr>
-        <p:blipFill>
-          <a:blip r:embed="rId6"/>
-          <a:stretch>
-            <a:fillRect/>
-          </a:stretch>
-        </p:blipFill>
-        <p:spPr>
-          <a:xfrm>
-            <a:off x="7900400" y="1249398"/>
-            <a:ext cx="929493" cy="279603"/>
-          </a:xfrm>
-          <a:prstGeom prst="rect">
-            <a:avLst/>
-          </a:prstGeom>
-        </p:spPr>
-      </p:pic>
       <p:sp>
         <p:nvSpPr>
           <p:cNvPr id="26" name="Google Shape;885;p91">
